--- a/2025/LEC/04-2  анализ невязок предсказаний ВР.pptx
+++ b/2025/LEC/04-2  анализ невязок предсказаний ВР.pptx
@@ -5,7 +5,7 @@
     <p:sldMasterId id="2147483648" r:id="rId1"/>
   </p:sldMasterIdLst>
   <p:notesMasterIdLst>
-    <p:notesMasterId r:id="rId21"/>
+    <p:notesMasterId r:id="rId22"/>
   </p:notesMasterIdLst>
   <p:sldIdLst>
     <p:sldId id="393" r:id="rId2"/>
@@ -27,6 +27,7 @@
     <p:sldId id="401" r:id="rId18"/>
     <p:sldId id="404" r:id="rId19"/>
     <p:sldId id="405" r:id="rId20"/>
+    <p:sldId id="471" r:id="rId21"/>
   </p:sldIdLst>
   <p:sldSz cx="12192000" cy="6858000"/>
   <p:notesSz cx="6858000" cy="9144000"/>
@@ -149,6 +150,7 @@
             <p14:sldId id="401"/>
             <p14:sldId id="404"/>
             <p14:sldId id="405"/>
+            <p14:sldId id="471"/>
           </p14:sldIdLst>
         </p14:section>
       </p14:sectionLst>
@@ -242,7 +244,7 @@
           <a:p>
             <a:fld id="{C730246F-5962-E14A-AAF2-985CCFDAC345}" type="datetimeFigureOut">
               <a:rPr lang="ru-RU" smtClean="0"/>
-              <a:t>15.07.2025</a:t>
+              <a:t>20.08.2025</a:t>
             </a:fld>
             <a:endParaRPr lang="ru-RU"/>
           </a:p>
@@ -1150,7 +1152,7 @@
           <a:p>
             <a:fld id="{44343DC6-30E4-4569-999A-C703F926F2AF}" type="datetimeFigureOut">
               <a:rPr lang="en-US" smtClean="0"/>
-              <a:t>7/15/2025</a:t>
+              <a:t>8/20/2025</a:t>
             </a:fld>
             <a:endParaRPr lang="en-US"/>
           </a:p>
@@ -1350,7 +1352,7 @@
           <a:p>
             <a:fld id="{44343DC6-30E4-4569-999A-C703F926F2AF}" type="datetimeFigureOut">
               <a:rPr lang="en-US" smtClean="0"/>
-              <a:t>7/15/2025</a:t>
+              <a:t>8/20/2025</a:t>
             </a:fld>
             <a:endParaRPr lang="en-US"/>
           </a:p>
@@ -1560,7 +1562,7 @@
           <a:p>
             <a:fld id="{44343DC6-30E4-4569-999A-C703F926F2AF}" type="datetimeFigureOut">
               <a:rPr lang="en-US" smtClean="0"/>
-              <a:t>7/15/2025</a:t>
+              <a:t>8/20/2025</a:t>
             </a:fld>
             <a:endParaRPr lang="en-US"/>
           </a:p>
@@ -1760,7 +1762,7 @@
           <a:p>
             <a:fld id="{44343DC6-30E4-4569-999A-C703F926F2AF}" type="datetimeFigureOut">
               <a:rPr lang="en-US" smtClean="0"/>
-              <a:t>7/15/2025</a:t>
+              <a:t>8/20/2025</a:t>
             </a:fld>
             <a:endParaRPr lang="en-US"/>
           </a:p>
@@ -2036,7 +2038,7 @@
           <a:p>
             <a:fld id="{44343DC6-30E4-4569-999A-C703F926F2AF}" type="datetimeFigureOut">
               <a:rPr lang="en-US" smtClean="0"/>
-              <a:t>7/15/2025</a:t>
+              <a:t>8/20/2025</a:t>
             </a:fld>
             <a:endParaRPr lang="en-US"/>
           </a:p>
@@ -2304,7 +2306,7 @@
           <a:p>
             <a:fld id="{44343DC6-30E4-4569-999A-C703F926F2AF}" type="datetimeFigureOut">
               <a:rPr lang="en-US" smtClean="0"/>
-              <a:t>7/15/2025</a:t>
+              <a:t>8/20/2025</a:t>
             </a:fld>
             <a:endParaRPr lang="en-US"/>
           </a:p>
@@ -2719,7 +2721,7 @@
           <a:p>
             <a:fld id="{44343DC6-30E4-4569-999A-C703F926F2AF}" type="datetimeFigureOut">
               <a:rPr lang="en-US" smtClean="0"/>
-              <a:t>7/15/2025</a:t>
+              <a:t>8/20/2025</a:t>
             </a:fld>
             <a:endParaRPr lang="en-US"/>
           </a:p>
@@ -2861,7 +2863,7 @@
           <a:p>
             <a:fld id="{44343DC6-30E4-4569-999A-C703F926F2AF}" type="datetimeFigureOut">
               <a:rPr lang="en-US" smtClean="0"/>
-              <a:t>7/15/2025</a:t>
+              <a:t>8/20/2025</a:t>
             </a:fld>
             <a:endParaRPr lang="en-US"/>
           </a:p>
@@ -2974,7 +2976,7 @@
           <a:p>
             <a:fld id="{44343DC6-30E4-4569-999A-C703F926F2AF}" type="datetimeFigureOut">
               <a:rPr lang="en-US" smtClean="0"/>
-              <a:t>7/15/2025</a:t>
+              <a:t>8/20/2025</a:t>
             </a:fld>
             <a:endParaRPr lang="en-US"/>
           </a:p>
@@ -3287,7 +3289,7 @@
           <a:p>
             <a:fld id="{44343DC6-30E4-4569-999A-C703F926F2AF}" type="datetimeFigureOut">
               <a:rPr lang="en-US" smtClean="0"/>
-              <a:t>7/15/2025</a:t>
+              <a:t>8/20/2025</a:t>
             </a:fld>
             <a:endParaRPr lang="en-US"/>
           </a:p>
@@ -3576,7 +3578,7 @@
           <a:p>
             <a:fld id="{44343DC6-30E4-4569-999A-C703F926F2AF}" type="datetimeFigureOut">
               <a:rPr lang="en-US" smtClean="0"/>
-              <a:t>7/15/2025</a:t>
+              <a:t>8/20/2025</a:t>
             </a:fld>
             <a:endParaRPr lang="en-US"/>
           </a:p>
@@ -3819,7 +3821,7 @@
           <a:p>
             <a:fld id="{44343DC6-30E4-4569-999A-C703F926F2AF}" type="datetimeFigureOut">
               <a:rPr lang="en-US" smtClean="0"/>
-              <a:t>7/15/2025</a:t>
+              <a:t>8/20/2025</a:t>
             </a:fld>
             <a:endParaRPr lang="en-US"/>
           </a:p>
@@ -4399,7 +4401,7 @@
         <p:spPr>
           <a:xfrm>
             <a:off x="216060" y="1025018"/>
-            <a:ext cx="11802321" cy="5458078"/>
+            <a:ext cx="11975940" cy="5458078"/>
           </a:xfrm>
         </p:spPr>
         <p:txBody>
@@ -4691,7 +4693,11 @@
           <a:bodyPr/>
           <a:lstStyle/>
           <a:p>
-            <a:endParaRPr lang="ru-RU"/>
+            <a:r>
+              <a:rPr lang="ru-RU" dirty="0" smtClean="0"/>
+              <a:t>Примеры тестов анализа невязок</a:t>
+            </a:r>
+            <a:endParaRPr lang="ru-RU" dirty="0"/>
           </a:p>
         </p:txBody>
       </p:sp>
@@ -4711,7 +4717,7 @@
             <p:ph idx="1"/>
             <p:extLst>
               <p:ext uri="{D42A27DB-BD31-4B8C-83A1-F6EECF244321}">
-                <p14:modId xmlns:p14="http://schemas.microsoft.com/office/powerpoint/2010/main" val="396896059"/>
+                <p14:modId xmlns:p14="http://schemas.microsoft.com/office/powerpoint/2010/main" val="1748981348"/>
               </p:ext>
             </p:extLst>
           </p:nvPr>
@@ -4753,11 +4759,11 @@
                     <a:bodyPr/>
                     <a:lstStyle/>
                     <a:p>
-                      <a:pPr>
+                      <a:pPr algn="ctr">
                         <a:buNone/>
                       </a:pPr>
                       <a:r>
-                        <a:rPr lang="ru-RU" sz="1800" b="1">
+                        <a:rPr lang="ru-RU" sz="1800" b="1" dirty="0">
                           <a:solidFill>
                             <a:srgbClr val="000000"/>
                           </a:solidFill>
@@ -4766,7 +4772,7 @@
                         </a:rPr>
                         <a:t>Задача</a:t>
                       </a:r>
-                      <a:endParaRPr lang="ru-RU" sz="1800">
+                      <a:endParaRPr lang="ru-RU" sz="1800" dirty="0">
                         <a:effectLst/>
                         <a:latin typeface="+mn-lt"/>
                       </a:endParaRPr>
@@ -4819,7 +4825,7 @@
                     <a:bodyPr/>
                     <a:lstStyle/>
                     <a:p>
-                      <a:pPr>
+                      <a:pPr algn="ctr">
                         <a:buNone/>
                       </a:pPr>
                       <a:r>
@@ -4885,7 +4891,7 @@
                     <a:bodyPr/>
                     <a:lstStyle/>
                     <a:p>
-                      <a:pPr>
+                      <a:pPr algn="ctr">
                         <a:buNone/>
                       </a:pPr>
                       <a:r>
@@ -4958,11 +4964,11 @@
                     <a:bodyPr/>
                     <a:lstStyle/>
                     <a:p>
-                      <a:pPr>
+                      <a:pPr algn="ctr">
                         <a:buNone/>
                       </a:pPr>
                       <a:r>
-                        <a:rPr lang="ru-RU" sz="1800" b="1">
+                        <a:rPr lang="ru-RU" sz="1800" b="1" dirty="0">
                           <a:solidFill>
                             <a:srgbClr val="000000"/>
                           </a:solidFill>
@@ -4971,7 +4977,7 @@
                         </a:rPr>
                         <a:t>Автокорреляция остатков</a:t>
                       </a:r>
-                      <a:endParaRPr lang="ru-RU" sz="1800">
+                      <a:endParaRPr lang="ru-RU" sz="1800" dirty="0">
                         <a:effectLst/>
                         <a:latin typeface="+mn-lt"/>
                       </a:endParaRPr>
@@ -5024,7 +5030,7 @@
                     <a:bodyPr/>
                     <a:lstStyle/>
                     <a:p>
-                      <a:pPr>
+                      <a:pPr algn="ctr">
                         <a:buNone/>
                       </a:pPr>
                       <a:r>
@@ -5088,7 +5094,7 @@
                     <a:bodyPr/>
                     <a:lstStyle/>
                     <a:p>
-                      <a:pPr>
+                      <a:pPr algn="ctr">
                         <a:buNone/>
                       </a:pPr>
                       <a:r>
@@ -5159,11 +5165,11 @@
                     <a:bodyPr/>
                     <a:lstStyle/>
                     <a:p>
-                      <a:pPr>
+                      <a:pPr algn="ctr">
                         <a:buNone/>
                       </a:pPr>
                       <a:r>
-                        <a:rPr lang="ru-RU" sz="1800" b="1">
+                        <a:rPr lang="ru-RU" sz="1800" b="1" dirty="0" err="1">
                           <a:solidFill>
                             <a:srgbClr val="000000"/>
                           </a:solidFill>
@@ -5172,7 +5178,7 @@
                         </a:rPr>
                         <a:t>Гетероскедастичность</a:t>
                       </a:r>
-                      <a:endParaRPr lang="ru-RU" sz="1800">
+                      <a:endParaRPr lang="ru-RU" sz="1800" dirty="0">
                         <a:effectLst/>
                         <a:latin typeface="+mn-lt"/>
                       </a:endParaRPr>
@@ -5225,11 +5231,11 @@
                     <a:bodyPr/>
                     <a:lstStyle/>
                     <a:p>
-                      <a:pPr>
+                      <a:pPr algn="ctr">
                         <a:buNone/>
                       </a:pPr>
                       <a:r>
-                        <a:rPr lang="en" sz="1800">
+                        <a:rPr lang="en" sz="1800" dirty="0">
                           <a:solidFill>
                             <a:srgbClr val="000000"/>
                           </a:solidFill>
@@ -5238,7 +5244,7 @@
                         </a:rPr>
                         <a:t>McLeod–Li, ArchTest</a:t>
                       </a:r>
-                      <a:endParaRPr lang="en" sz="1800">
+                      <a:endParaRPr lang="en" sz="1800" dirty="0">
                         <a:effectLst/>
                         <a:latin typeface="+mn-lt"/>
                       </a:endParaRPr>
@@ -5289,7 +5295,7 @@
                     <a:bodyPr/>
                     <a:lstStyle/>
                     <a:p>
-                      <a:pPr>
+                      <a:pPr algn="ctr">
                         <a:buNone/>
                       </a:pPr>
                       <a:r>
@@ -5360,7 +5366,7 @@
                     <a:bodyPr/>
                     <a:lstStyle/>
                     <a:p>
-                      <a:pPr>
+                      <a:pPr algn="ctr">
                         <a:buNone/>
                       </a:pPr>
                       <a:r>
@@ -5426,11 +5432,11 @@
                     <a:bodyPr/>
                     <a:lstStyle/>
                     <a:p>
-                      <a:pPr>
+                      <a:pPr algn="ctr">
                         <a:buNone/>
                       </a:pPr>
                       <a:r>
-                        <a:rPr lang="en" sz="1800">
+                        <a:rPr lang="en" sz="1800" dirty="0">
                           <a:solidFill>
                             <a:srgbClr val="000000"/>
                           </a:solidFill>
@@ -5439,7 +5445,7 @@
                         </a:rPr>
                         <a:t>IQR, Grubbs</a:t>
                       </a:r>
-                      <a:endParaRPr lang="en" sz="1800">
+                      <a:endParaRPr lang="en" sz="1800" dirty="0">
                         <a:effectLst/>
                         <a:latin typeface="+mn-lt"/>
                       </a:endParaRPr>
@@ -5490,7 +5496,7 @@
                     <a:bodyPr/>
                     <a:lstStyle/>
                     <a:p>
-                      <a:pPr>
+                      <a:pPr algn="ctr">
                         <a:buNone/>
                       </a:pPr>
                       <a:r>
@@ -5561,7 +5567,7 @@
                     <a:bodyPr/>
                     <a:lstStyle/>
                     <a:p>
-                      <a:pPr>
+                      <a:pPr algn="ctr">
                         <a:buNone/>
                       </a:pPr>
                       <a:r>
@@ -5627,11 +5633,11 @@
                     <a:bodyPr/>
                     <a:lstStyle/>
                     <a:p>
-                      <a:pPr>
+                      <a:pPr algn="ctr">
                         <a:buNone/>
                       </a:pPr>
                       <a:r>
-                        <a:rPr lang="en" sz="1800">
+                        <a:rPr lang="en" sz="1800" dirty="0">
                           <a:solidFill>
                             <a:srgbClr val="000000"/>
                           </a:solidFill>
@@ -5640,7 +5646,7 @@
                         </a:rPr>
                         <a:t>ADF, KPSS</a:t>
                       </a:r>
-                      <a:endParaRPr lang="en" sz="1800">
+                      <a:endParaRPr lang="en" sz="1800" dirty="0">
                         <a:effectLst/>
                         <a:latin typeface="+mn-lt"/>
                       </a:endParaRPr>
@@ -5691,7 +5697,7 @@
                     <a:bodyPr/>
                     <a:lstStyle/>
                     <a:p>
-                      <a:pPr>
+                      <a:pPr algn="ctr">
                         <a:buNone/>
                       </a:pPr>
                       <a:r>
@@ -5762,7 +5768,7 @@
                     <a:bodyPr/>
                     <a:lstStyle/>
                     <a:p>
-                      <a:pPr>
+                      <a:pPr algn="ctr">
                         <a:buNone/>
                       </a:pPr>
                       <a:r>
@@ -5828,11 +5834,11 @@
                     <a:bodyPr/>
                     <a:lstStyle/>
                     <a:p>
-                      <a:pPr>
+                      <a:pPr algn="ctr">
                         <a:buNone/>
                       </a:pPr>
                       <a:r>
-                        <a:rPr lang="en" sz="1800">
+                        <a:rPr lang="en" sz="1800" dirty="0">
                           <a:solidFill>
                             <a:srgbClr val="000000"/>
                           </a:solidFill>
@@ -5841,7 +5847,7 @@
                         </a:rPr>
                         <a:t>Shapiro–Wilk, Jarque–Bera</a:t>
                       </a:r>
-                      <a:endParaRPr lang="en" sz="1800">
+                      <a:endParaRPr lang="en" sz="1800" dirty="0">
                         <a:effectLst/>
                         <a:latin typeface="+mn-lt"/>
                       </a:endParaRPr>
@@ -5892,11 +5898,11 @@
                     <a:bodyPr/>
                     <a:lstStyle/>
                     <a:p>
-                      <a:pPr>
+                      <a:pPr algn="ctr">
                         <a:buNone/>
                       </a:pPr>
                       <a:r>
-                        <a:rPr lang="ru-RU" sz="1800">
+                        <a:rPr lang="ru-RU" sz="1800" dirty="0">
                           <a:solidFill>
                             <a:srgbClr val="000000"/>
                           </a:solidFill>
@@ -5905,7 +5911,7 @@
                         </a:rPr>
                         <a:t>Для построения доверительных интервалов</a:t>
                       </a:r>
-                      <a:endParaRPr lang="ru-RU" sz="1800">
+                      <a:endParaRPr lang="ru-RU" sz="1800" dirty="0">
                         <a:effectLst/>
                         <a:latin typeface="+mn-lt"/>
                       </a:endParaRPr>
@@ -5963,7 +5969,7 @@
                     <a:bodyPr/>
                     <a:lstStyle/>
                     <a:p>
-                      <a:pPr>
+                      <a:pPr algn="ctr">
                         <a:buNone/>
                       </a:pPr>
                       <a:r>
@@ -6029,7 +6035,7 @@
                     <a:bodyPr/>
                     <a:lstStyle/>
                     <a:p>
-                      <a:pPr>
+                      <a:pPr algn="ctr">
                         <a:buNone/>
                       </a:pPr>
                       <a:r>
@@ -6093,11 +6099,11 @@
                     <a:bodyPr/>
                     <a:lstStyle/>
                     <a:p>
-                      <a:pPr>
+                      <a:pPr algn="ctr">
                         <a:buNone/>
                       </a:pPr>
                       <a:r>
-                        <a:rPr lang="ru-RU" sz="1800">
+                        <a:rPr lang="ru-RU" sz="1800" dirty="0">
                           <a:solidFill>
                             <a:srgbClr val="000000"/>
                           </a:solidFill>
@@ -6106,7 +6112,7 @@
                         </a:rPr>
                         <a:t>Для анализа стабильности модели</a:t>
                       </a:r>
-                      <a:endParaRPr lang="ru-RU" sz="1800">
+                      <a:endParaRPr lang="ru-RU" sz="1800" dirty="0">
                         <a:effectLst/>
                         <a:latin typeface="+mn-lt"/>
                       </a:endParaRPr>
@@ -6164,7 +6170,7 @@
                     <a:bodyPr/>
                     <a:lstStyle/>
                     <a:p>
-                      <a:pPr>
+                      <a:pPr algn="ctr">
                         <a:buNone/>
                       </a:pPr>
                       <a:r>
@@ -6230,7 +6236,7 @@
                     <a:bodyPr/>
                     <a:lstStyle/>
                     <a:p>
-                      <a:pPr>
+                      <a:pPr algn="ctr">
                         <a:buNone/>
                       </a:pPr>
                       <a:r>
@@ -6304,11 +6310,11 @@
                     <a:bodyPr/>
                     <a:lstStyle/>
                     <a:p>
-                      <a:pPr>
+                      <a:pPr algn="ctr">
                         <a:buNone/>
                       </a:pPr>
                       <a:r>
-                        <a:rPr lang="ru-RU" sz="1800">
+                        <a:rPr lang="ru-RU" sz="1800" dirty="0">
                           <a:solidFill>
                             <a:srgbClr val="000000"/>
                           </a:solidFill>
@@ -6317,7 +6323,7 @@
                         </a:rPr>
                         <a:t>Для проверки систематической ошибки</a:t>
                       </a:r>
-                      <a:endParaRPr lang="ru-RU" sz="1800">
+                      <a:endParaRPr lang="ru-RU" sz="1800" dirty="0">
                         <a:effectLst/>
                         <a:latin typeface="+mn-lt"/>
                       </a:endParaRPr>
@@ -6375,7 +6381,7 @@
                     <a:bodyPr/>
                     <a:lstStyle/>
                     <a:p>
-                      <a:pPr>
+                      <a:pPr algn="ctr">
                         <a:buNone/>
                       </a:pPr>
                       <a:r>
@@ -6441,7 +6447,7 @@
                     <a:bodyPr/>
                     <a:lstStyle/>
                     <a:p>
-                      <a:pPr>
+                      <a:pPr algn="ctr">
                         <a:buNone/>
                       </a:pPr>
                       <a:r>
@@ -6505,11 +6511,11 @@
                     <a:bodyPr/>
                     <a:lstStyle/>
                     <a:p>
-                      <a:pPr>
+                      <a:pPr algn="ctr">
                         <a:buNone/>
                       </a:pPr>
                       <a:r>
-                        <a:rPr lang="ru-RU" sz="1800">
+                        <a:rPr lang="ru-RU" sz="1800" dirty="0">
                           <a:solidFill>
                             <a:srgbClr val="000000"/>
                           </a:solidFill>
@@ -6518,7 +6524,7 @@
                         </a:rPr>
                         <a:t>Для оценки качества интервалов</a:t>
                       </a:r>
-                      <a:endParaRPr lang="ru-RU" sz="1800">
+                      <a:endParaRPr lang="ru-RU" sz="1800" dirty="0">
                         <a:effectLst/>
                         <a:latin typeface="+mn-lt"/>
                       </a:endParaRPr>
@@ -6576,7 +6582,7 @@
                     <a:bodyPr/>
                     <a:lstStyle/>
                     <a:p>
-                      <a:pPr>
+                      <a:pPr algn="ctr">
                         <a:buNone/>
                       </a:pPr>
                       <a:r>
@@ -6642,7 +6648,7 @@
                     <a:bodyPr/>
                     <a:lstStyle/>
                     <a:p>
-                      <a:pPr>
+                      <a:pPr algn="ctr">
                         <a:buNone/>
                       </a:pPr>
                       <a:r>
@@ -6706,11 +6712,11 @@
                     <a:bodyPr/>
                     <a:lstStyle/>
                     <a:p>
-                      <a:pPr>
+                      <a:pPr algn="ctr">
                         <a:buNone/>
                       </a:pPr>
                       <a:r>
-                        <a:rPr lang="ru-RU" sz="1800">
+                        <a:rPr lang="ru-RU" sz="1800" dirty="0">
                           <a:solidFill>
                             <a:srgbClr val="000000"/>
                           </a:solidFill>
@@ -6719,7 +6725,7 @@
                         </a:rPr>
                         <a:t>Для построения интервалов без предположений</a:t>
                       </a:r>
-                      <a:endParaRPr lang="ru-RU" sz="1800">
+                      <a:endParaRPr lang="ru-RU" sz="1800" dirty="0">
                         <a:effectLst/>
                         <a:latin typeface="+mn-lt"/>
                       </a:endParaRPr>
@@ -6777,7 +6783,7 @@
                     <a:bodyPr/>
                     <a:lstStyle/>
                     <a:p>
-                      <a:pPr>
+                      <a:pPr algn="ctr">
                         <a:buNone/>
                       </a:pPr>
                       <a:r>
@@ -6843,7 +6849,7 @@
                     <a:bodyPr/>
                     <a:lstStyle/>
                     <a:p>
-                      <a:pPr>
+                      <a:pPr algn="ctr">
                         <a:buNone/>
                       </a:pPr>
                       <a:r>
@@ -6907,7 +6913,7 @@
                     <a:bodyPr/>
                     <a:lstStyle/>
                     <a:p>
-                      <a:pPr>
+                      <a:pPr algn="ctr">
                         <a:buNone/>
                       </a:pPr>
                       <a:r>
@@ -10229,6 +10235,130 @@
 </p:sld>
 </file>
 
+<file path=ppt/slides/slide20.xml><?xml version="1.0" encoding="utf-8"?>
+<p:sld xmlns:a="http://schemas.openxmlformats.org/drawingml/2006/main" xmlns:r="http://schemas.openxmlformats.org/officeDocument/2006/relationships" xmlns:p="http://schemas.openxmlformats.org/presentationml/2006/main">
+  <p:cSld>
+    <p:spTree>
+      <p:nvGrpSpPr>
+        <p:cNvPr id="1" name=""/>
+        <p:cNvGrpSpPr/>
+        <p:nvPr/>
+      </p:nvGrpSpPr>
+      <p:grpSpPr>
+        <a:xfrm>
+          <a:off x="0" y="0"/>
+          <a:ext cx="0" cy="0"/>
+          <a:chOff x="0" y="0"/>
+          <a:chExt cx="0" cy="0"/>
+        </a:xfrm>
+      </p:grpSpPr>
+      <p:sp>
+        <p:nvSpPr>
+          <p:cNvPr id="2" name="Заголовок 1"/>
+          <p:cNvSpPr>
+            <a:spLocks noGrp="1"/>
+          </p:cNvSpPr>
+          <p:nvPr>
+            <p:ph type="title"/>
+          </p:nvPr>
+        </p:nvSpPr>
+        <p:spPr>
+          <a:xfrm>
+            <a:off x="484632" y="99949"/>
+            <a:ext cx="11052048" cy="1024763"/>
+          </a:xfrm>
+        </p:spPr>
+        <p:txBody>
+          <a:bodyPr/>
+          <a:lstStyle/>
+          <a:p>
+            <a:pPr algn="ctr"/>
+            <a:r>
+              <a:rPr lang="ru-RU" dirty="0" smtClean="0"/>
+              <a:t>Вопросы для самоконтроля</a:t>
+            </a:r>
+            <a:endParaRPr lang="ru-RU" dirty="0"/>
+          </a:p>
+        </p:txBody>
+      </p:sp>
+      <p:sp>
+        <p:nvSpPr>
+          <p:cNvPr id="3" name="Объект 2"/>
+          <p:cNvSpPr>
+            <a:spLocks noGrp="1"/>
+          </p:cNvSpPr>
+          <p:nvPr>
+            <p:ph idx="1"/>
+          </p:nvPr>
+        </p:nvSpPr>
+        <p:spPr>
+          <a:xfrm>
+            <a:off x="301752" y="950976"/>
+            <a:ext cx="11768328" cy="5522976"/>
+          </a:xfrm>
+        </p:spPr>
+        <p:txBody>
+          <a:bodyPr/>
+          <a:lstStyle/>
+          <a:p>
+            <a:pPr lvl="0" algn="just"/>
+            <a:r>
+              <a:rPr lang="ru-RU" dirty="0"/>
+              <a:t>Объясните цели анализа невязок модели. Почему этот метод диагностики можно использовать на тренировочной выборке. Какие подходу к анализу невязок вы можете назвать и в каких случаях они будут полезны</a:t>
+            </a:r>
+            <a:r>
+              <a:rPr lang="ru-RU" dirty="0" smtClean="0"/>
+              <a:t>?</a:t>
+            </a:r>
+          </a:p>
+          <a:p>
+            <a:pPr lvl="0" algn="just"/>
+            <a:r>
+              <a:rPr lang="ru-RU" dirty="0" smtClean="0"/>
+              <a:t>Приведите примеры ВР и  основные проблемы невязок при использовании наивных методов которые могут быть. Какие методы диагностики в указанных случаях вы бы продолжили использовать.</a:t>
+            </a:r>
+          </a:p>
+          <a:p>
+            <a:pPr lvl="0" algn="just"/>
+            <a:r>
+              <a:rPr lang="ru-RU" dirty="0" smtClean="0"/>
+              <a:t>Попробуйте визуализировать примеры остатков и статистические тесты, подходящие для их диагностики.</a:t>
+            </a:r>
+          </a:p>
+          <a:p>
+            <a:pPr lvl="0" algn="just"/>
+            <a:r>
+              <a:rPr lang="ru-RU" dirty="0" smtClean="0"/>
+              <a:t>Проведите небольшой анализ как те или иные проблемы </a:t>
+            </a:r>
+            <a:r>
+              <a:rPr lang="ru-RU" dirty="0" err="1" smtClean="0"/>
+              <a:t>остатов</a:t>
+            </a:r>
+            <a:r>
+              <a:rPr lang="ru-RU" dirty="0" smtClean="0"/>
+              <a:t> ВР скажутся на метриках оценки качества предсказаний ВР (как на точечных, так и на вероятностных). Как это скажется на других параметрах предсказания (напр. горизонт, надежность).</a:t>
+            </a:r>
+            <a:endParaRPr lang="ru-RU" dirty="0"/>
+          </a:p>
+          <a:p>
+            <a:endParaRPr lang="ru-RU" dirty="0"/>
+          </a:p>
+        </p:txBody>
+      </p:sp>
+    </p:spTree>
+    <p:extLst>
+      <p:ext uri="{BB962C8B-B14F-4D97-AF65-F5344CB8AC3E}">
+        <p14:creationId xmlns:p14="http://schemas.microsoft.com/office/powerpoint/2010/main" val="1640483996"/>
+      </p:ext>
+    </p:extLst>
+  </p:cSld>
+  <p:clrMapOvr>
+    <a:masterClrMapping/>
+  </p:clrMapOvr>
+</p:sld>
+</file>
+
 <file path=ppt/slides/slide3.xml><?xml version="1.0" encoding="utf-8"?>
 <p:sld xmlns:a="http://schemas.openxmlformats.org/drawingml/2006/main" xmlns:r="http://schemas.openxmlformats.org/officeDocument/2006/relationships" xmlns:p="http://schemas.openxmlformats.org/presentationml/2006/main">
   <p:cSld>
@@ -12477,7 +12607,7 @@
         </p:nvSpPr>
         <p:spPr>
           <a:xfrm>
-            <a:off x="173619" y="228601"/>
+            <a:off x="216060" y="141847"/>
             <a:ext cx="11353800" cy="997510"/>
           </a:xfrm>
         </p:spPr>
@@ -12996,16 +13126,44 @@
           </p:cNvPicPr>
           <p:nvPr/>
         </p:nvPicPr>
-        <p:blipFill>
+        <p:blipFill rotWithShape="1">
           <a:blip r:embed="rId2"/>
-          <a:stretch>
-            <a:fillRect/>
-          </a:stretch>
+          <a:srcRect t="40595" r="49011"/>
+          <a:stretch/>
         </p:blipFill>
         <p:spPr>
           <a:xfrm>
-            <a:off x="7225372" y="1773290"/>
-            <a:ext cx="3820580" cy="1415030"/>
+            <a:off x="7106302" y="2251206"/>
+            <a:ext cx="3327002" cy="1435602"/>
+          </a:xfrm>
+          <a:prstGeom prst="rect">
+            <a:avLst/>
+          </a:prstGeom>
+        </p:spPr>
+      </p:pic>
+      <p:pic>
+        <p:nvPicPr>
+          <p:cNvPr id="7" name="Рисунок 6">
+            <a:extLst>
+              <a:ext uri="{FF2B5EF4-FFF2-40B4-BE49-F238E27FC236}">
+                <a16:creationId xmlns:a16="http://schemas.microsoft.com/office/drawing/2014/main" id="{F7BBFD0D-37A5-1291-9EAC-A9AA43533EED}"/>
+              </a:ext>
+            </a:extLst>
+          </p:cNvPr>
+          <p:cNvPicPr>
+            <a:picLocks noChangeAspect="1"/>
+          </p:cNvPicPr>
+          <p:nvPr/>
+        </p:nvPicPr>
+        <p:blipFill rotWithShape="1">
+          <a:blip r:embed="rId2"/>
+          <a:srcRect l="43114" r="12171" b="65800"/>
+          <a:stretch/>
+        </p:blipFill>
+        <p:spPr>
+          <a:xfrm>
+            <a:off x="7974702" y="1532622"/>
+            <a:ext cx="3757050" cy="1064273"/>
           </a:xfrm>
           <a:prstGeom prst="rect">
             <a:avLst/>
